--- a/src/ppt-super/assets/tpl-98-radial-command-hub/template.pptx
+++ b/src/ppt-super/assets/tpl-98-radial-command-hub/template.pptx
@@ -3136,7 +3136,14 @@
           <a:bodyPr rtlCol="0" anchor="ctr"/>
           <a:lstStyle/>
           <a:p>
-            <a:pPr algn="ctr"/>
+            <a:pPr algn="ctr">
+              <a:spcBef>
+                <a:spcPts val="0"/>
+              </a:spcBef>
+              <a:spcAft>
+                <a:spcPts val="0"/>
+              </a:spcAft>
+            </a:pPr>
           </a:p>
         </p:txBody>
       </p:sp>
@@ -3166,14 +3173,21 @@
               <a:lnSpc>
                 <a:spcPct val="112000"/>
               </a:lnSpc>
-            </a:pPr>
-            <a:r>
-              <a:rPr sz="1800" b="1" i="0">
+              <a:spcBef>
+                <a:spcPts val="0"/>
+              </a:spcBef>
+              <a:spcAft>
+                <a:spcPts val="0"/>
+              </a:spcAft>
+            </a:pPr>
+            <a:r>
+              <a:rPr sz="1800" b="1" i="0" lang="zh-CN" altLang="zh-CN">
                 <a:solidFill>
                   <a:srgbClr val="FFFFFF"/>
                 </a:solidFill>
                 <a:latin typeface="Microsoft YaHei"/>
                 <a:ea typeface="Microsoft YaHei"/>
+                <a:cs typeface="Microsoft YaHei"/>
               </a:rPr>
               <a:t>5G-A</a:t>
             </a:r>
@@ -3206,14 +3220,21 @@
               <a:lnSpc>
                 <a:spcPct val="112000"/>
               </a:lnSpc>
-            </a:pPr>
-            <a:r>
-              <a:rPr sz="2500" b="1" i="0">
+              <a:spcBef>
+                <a:spcPts val="0"/>
+              </a:spcBef>
+              <a:spcAft>
+                <a:spcPts val="0"/>
+              </a:spcAft>
+            </a:pPr>
+            <a:r>
+              <a:rPr sz="2500" b="1" i="0" lang="zh-CN" altLang="zh-CN">
                 <a:solidFill>
                   <a:srgbClr val="B90A0A"/>
                 </a:solidFill>
                 <a:latin typeface="Microsoft YaHei"/>
                 <a:ea typeface="Microsoft YaHei"/>
+                <a:cs typeface="Microsoft YaHei"/>
               </a:rPr>
               <a:t>上下行联合优化: 上行容量 +20% @ 下行性能微损</a:t>
             </a:r>
@@ -3298,7 +3319,14 @@
           <a:bodyPr rtlCol="0" anchor="ctr"/>
           <a:lstStyle/>
           <a:p>
-            <a:pPr algn="ctr"/>
+            <a:pPr algn="ctr">
+              <a:spcBef>
+                <a:spcPts val="0"/>
+              </a:spcBef>
+              <a:spcAft>
+                <a:spcPts val="0"/>
+              </a:spcAft>
+            </a:pPr>
           </a:p>
         </p:txBody>
       </p:sp>
@@ -3342,7 +3370,14 @@
           <a:bodyPr rtlCol="0" anchor="ctr"/>
           <a:lstStyle/>
           <a:p>
-            <a:pPr algn="ctr"/>
+            <a:pPr algn="ctr">
+              <a:spcBef>
+                <a:spcPts val="0"/>
+              </a:spcBef>
+              <a:spcAft>
+                <a:spcPts val="0"/>
+              </a:spcAft>
+            </a:pPr>
           </a:p>
         </p:txBody>
       </p:sp>
@@ -3372,14 +3407,21 @@
               <a:lnSpc>
                 <a:spcPct val="112000"/>
               </a:lnSpc>
-            </a:pPr>
-            <a:r>
-              <a:rPr sz="1350" b="1" i="0">
+              <a:spcBef>
+                <a:spcPts val="0"/>
+              </a:spcBef>
+              <a:spcAft>
+                <a:spcPts val="0"/>
+              </a:spcAft>
+            </a:pPr>
+            <a:r>
+              <a:rPr sz="1350" b="1" i="0" lang="zh-CN" altLang="zh-CN">
                 <a:solidFill>
                   <a:srgbClr val="262626"/>
                 </a:solidFill>
                 <a:latin typeface="Microsoft YaHei"/>
                 <a:ea typeface="Microsoft YaHei"/>
+                <a:cs typeface="Microsoft YaHei"/>
               </a:rPr>
               <a:t>背景与价值分析</a:t>
             </a:r>
@@ -3412,14 +3454,21 @@
               <a:lnSpc>
                 <a:spcPct val="118000"/>
               </a:lnSpc>
-            </a:pPr>
-            <a:r>
-              <a:rPr sz="1019" b="0" i="0">
+              <a:spcBef>
+                <a:spcPts val="0"/>
+              </a:spcBef>
+              <a:spcAft>
+                <a:spcPts val="0"/>
+              </a:spcAft>
+            </a:pPr>
+            <a:r>
+              <a:rPr sz="1019" b="0" i="0" lang="zh-CN" altLang="zh-CN">
                 <a:solidFill>
                   <a:srgbClr val="262626"/>
                 </a:solidFill>
                 <a:latin typeface="Microsoft YaHei"/>
                 <a:ea typeface="Microsoft YaHei"/>
+                <a:cs typeface="Microsoft YaHei"/>
               </a:rPr>
               <a:t>5G 系统设计采用上下行半静态配比, 上行受限于下行资源分配; 同时控制信道 (PDCCH) 需占用上行时频资源, 在高负载下与数据信道争抢, 上行可用资源被进一步压缩。传统调度上下行相互独立, 缺乏面向上行需求的动态协同, 上行能力难以充分释放, 成为制约上行体验的结构性瓶颈。</a:t>
             </a:r>
@@ -3466,7 +3515,14 @@
           <a:bodyPr rtlCol="0" anchor="ctr"/>
           <a:lstStyle/>
           <a:p>
-            <a:pPr algn="ctr"/>
+            <a:pPr algn="ctr">
+              <a:spcBef>
+                <a:spcPts val="0"/>
+              </a:spcBef>
+              <a:spcAft>
+                <a:spcPts val="0"/>
+              </a:spcAft>
+            </a:pPr>
           </a:p>
         </p:txBody>
       </p:sp>
@@ -3510,7 +3566,14 @@
           <a:bodyPr rtlCol="0" anchor="ctr"/>
           <a:lstStyle/>
           <a:p>
-            <a:pPr algn="ctr"/>
+            <a:pPr algn="ctr">
+              <a:spcBef>
+                <a:spcPts val="0"/>
+              </a:spcBef>
+              <a:spcAft>
+                <a:spcPts val="0"/>
+              </a:spcAft>
+            </a:pPr>
           </a:p>
         </p:txBody>
       </p:sp>
@@ -3540,14 +3603,21 @@
               <a:lnSpc>
                 <a:spcPct val="112000"/>
               </a:lnSpc>
-            </a:pPr>
-            <a:r>
-              <a:rPr sz="1350" b="1" i="0">
+              <a:spcBef>
+                <a:spcPts val="0"/>
+              </a:spcBef>
+              <a:spcAft>
+                <a:spcPts val="0"/>
+              </a:spcAft>
+            </a:pPr>
+            <a:r>
+              <a:rPr sz="1350" b="1" i="0" lang="zh-CN" altLang="zh-CN">
                 <a:solidFill>
                   <a:srgbClr val="262626"/>
                 </a:solidFill>
                 <a:latin typeface="Microsoft YaHei"/>
                 <a:ea typeface="Microsoft YaHei"/>
+                <a:cs typeface="Microsoft YaHei"/>
               </a:rPr>
               <a:t>现状与问题分析</a:t>
             </a:r>
@@ -3580,14 +3650,21 @@
               <a:lnSpc>
                 <a:spcPct val="118000"/>
               </a:lnSpc>
-            </a:pPr>
-            <a:r>
-              <a:rPr sz="1000" b="0" i="0">
+              <a:spcBef>
+                <a:spcPts val="0"/>
+              </a:spcBef>
+              <a:spcAft>
+                <a:spcPts val="0"/>
+              </a:spcAft>
+            </a:pPr>
+            <a:r>
+              <a:rPr sz="1000" b="0" i="0" lang="zh-CN" altLang="zh-CN">
                 <a:solidFill>
                   <a:srgbClr val="262626"/>
                 </a:solidFill>
                 <a:latin typeface="Microsoft YaHei"/>
                 <a:ea typeface="Microsoft YaHei"/>
+                <a:cs typeface="Microsoft YaHei"/>
               </a:rPr>
               <a:t>现网与仿真数据分析表明: 随负载升高, 上行吞吐快速衰减, 高负载小区上行容量较轻载显著下降, 上行时延抖动加剧, 印证了上下行割裂调度下的上行瓶颈。</a:t>
             </a:r>
@@ -3638,7 +3715,14 @@
           <a:bodyPr rtlCol="0" anchor="ctr"/>
           <a:lstStyle/>
           <a:p>
-            <a:pPr algn="ctr"/>
+            <a:pPr algn="ctr">
+              <a:spcBef>
+                <a:spcPts val="0"/>
+              </a:spcBef>
+              <a:spcAft>
+                <a:spcPts val="0"/>
+              </a:spcAft>
+            </a:pPr>
           </a:p>
         </p:txBody>
       </p:sp>
@@ -3686,7 +3770,14 @@
           <a:bodyPr rtlCol="0" anchor="ctr"/>
           <a:lstStyle/>
           <a:p>
-            <a:pPr algn="ctr"/>
+            <a:pPr algn="ctr">
+              <a:spcBef>
+                <a:spcPts val="0"/>
+              </a:spcBef>
+              <a:spcAft>
+                <a:spcPts val="0"/>
+              </a:spcAft>
+            </a:pPr>
           </a:p>
         </p:txBody>
       </p:sp>
@@ -3770,8 +3861,8 @@
         </p:nvSpPr>
         <p:spPr>
           <a:xfrm>
-            <a:off x="800100" y="4368800"/>
-            <a:ext cx="584200" cy="228600"/>
+            <a:off x="800100" y="4333494"/>
+            <a:ext cx="584200" cy="299212"/>
           </a:xfrm>
           <a:prstGeom prst="rect">
             <a:avLst/>
@@ -3788,14 +3879,21 @@
               <a:lnSpc>
                 <a:spcPct val="112000"/>
               </a:lnSpc>
-            </a:pPr>
-            <a:r>
-              <a:rPr sz="1750" b="1" i="0">
+              <a:spcBef>
+                <a:spcPts val="0"/>
+              </a:spcBef>
+              <a:spcAft>
+                <a:spcPts val="0"/>
+              </a:spcAft>
+            </a:pPr>
+            <a:r>
+              <a:rPr sz="1750" b="1" i="0" lang="zh-CN" altLang="zh-CN">
                 <a:solidFill>
                   <a:srgbClr val="0F335E"/>
                 </a:solidFill>
                 <a:latin typeface="Microsoft YaHei"/>
                 <a:ea typeface="Microsoft YaHei"/>
+                <a:cs typeface="Microsoft YaHei"/>
               </a:rPr>
               <a:t>-18%</a:t>
             </a:r>
@@ -3828,14 +3926,21 @@
               <a:lnSpc>
                 <a:spcPct val="112000"/>
               </a:lnSpc>
-            </a:pPr>
-            <a:r>
-              <a:rPr sz="1019" b="1" i="0">
+              <a:spcBef>
+                <a:spcPts val="0"/>
+              </a:spcBef>
+              <a:spcAft>
+                <a:spcPts val="0"/>
+              </a:spcAft>
+            </a:pPr>
+            <a:r>
+              <a:rPr sz="1019" b="1" i="0" lang="zh-CN" altLang="zh-CN">
                 <a:solidFill>
                   <a:srgbClr val="262626"/>
                 </a:solidFill>
                 <a:latin typeface="Microsoft YaHei"/>
                 <a:ea typeface="Microsoft YaHei"/>
+                <a:cs typeface="Microsoft YaHei"/>
               </a:rPr>
               <a:t>上行吞吐</a:t>
             </a:r>
@@ -3868,14 +3973,21 @@
               <a:lnSpc>
                 <a:spcPct val="112000"/>
               </a:lnSpc>
-            </a:pPr>
-            <a:r>
-              <a:rPr sz="880" b="0" i="0">
+              <a:spcBef>
+                <a:spcPts val="0"/>
+              </a:spcBef>
+              <a:spcAft>
+                <a:spcPts val="0"/>
+              </a:spcAft>
+            </a:pPr>
+            <a:r>
+              <a:rPr sz="880" b="0" i="0" lang="zh-CN" altLang="zh-CN">
                 <a:solidFill>
                   <a:srgbClr val="595959"/>
                 </a:solidFill>
                 <a:latin typeface="Microsoft YaHei"/>
                 <a:ea typeface="Microsoft YaHei"/>
+                <a:cs typeface="Microsoft YaHei"/>
               </a:rPr>
               <a:t>高负载 vs 轻载</a:t>
             </a:r>
@@ -3926,7 +4038,14 @@
           <a:bodyPr rtlCol="0" anchor="ctr"/>
           <a:lstStyle/>
           <a:p>
-            <a:pPr algn="ctr"/>
+            <a:pPr algn="ctr">
+              <a:spcBef>
+                <a:spcPts val="0"/>
+              </a:spcBef>
+              <a:spcAft>
+                <a:spcPts val="0"/>
+              </a:spcAft>
+            </a:pPr>
           </a:p>
         </p:txBody>
       </p:sp>
@@ -3974,7 +4093,14 @@
           <a:bodyPr rtlCol="0" anchor="ctr"/>
           <a:lstStyle/>
           <a:p>
-            <a:pPr algn="ctr"/>
+            <a:pPr algn="ctr">
+              <a:spcBef>
+                <a:spcPts val="0"/>
+              </a:spcBef>
+              <a:spcAft>
+                <a:spcPts val="0"/>
+              </a:spcAft>
+            </a:pPr>
           </a:p>
         </p:txBody>
       </p:sp>
@@ -4058,8 +4184,8 @@
         </p:nvSpPr>
         <p:spPr>
           <a:xfrm>
-            <a:off x="2184400" y="4368800"/>
-            <a:ext cx="584200" cy="228600"/>
+            <a:off x="2184400" y="4333494"/>
+            <a:ext cx="584200" cy="299212"/>
           </a:xfrm>
           <a:prstGeom prst="rect">
             <a:avLst/>
@@ -4076,14 +4202,21 @@
               <a:lnSpc>
                 <a:spcPct val="112000"/>
               </a:lnSpc>
-            </a:pPr>
-            <a:r>
-              <a:rPr sz="1750" b="1" i="0">
+              <a:spcBef>
+                <a:spcPts val="0"/>
+              </a:spcBef>
+              <a:spcAft>
+                <a:spcPts val="0"/>
+              </a:spcAft>
+            </a:pPr>
+            <a:r>
+              <a:rPr sz="1750" b="1" i="0" lang="zh-CN" altLang="zh-CN">
                 <a:solidFill>
                   <a:srgbClr val="0F335E"/>
                 </a:solidFill>
                 <a:latin typeface="Microsoft YaHei"/>
                 <a:ea typeface="Microsoft YaHei"/>
+                <a:cs typeface="Microsoft YaHei"/>
               </a:rPr>
               <a:t>+32%</a:t>
             </a:r>
@@ -4116,14 +4249,21 @@
               <a:lnSpc>
                 <a:spcPct val="112000"/>
               </a:lnSpc>
-            </a:pPr>
-            <a:r>
-              <a:rPr sz="1019" b="1" i="0">
+              <a:spcBef>
+                <a:spcPts val="0"/>
+              </a:spcBef>
+              <a:spcAft>
+                <a:spcPts val="0"/>
+              </a:spcAft>
+            </a:pPr>
+            <a:r>
+              <a:rPr sz="1019" b="1" i="0" lang="zh-CN" altLang="zh-CN">
                 <a:solidFill>
                   <a:srgbClr val="262626"/>
                 </a:solidFill>
                 <a:latin typeface="Microsoft YaHei"/>
                 <a:ea typeface="Microsoft YaHei"/>
+                <a:cs typeface="Microsoft YaHei"/>
               </a:rPr>
               <a:t>时延抖动</a:t>
             </a:r>
@@ -4156,14 +4296,21 @@
               <a:lnSpc>
                 <a:spcPct val="112000"/>
               </a:lnSpc>
-            </a:pPr>
-            <a:r>
-              <a:rPr sz="880" b="0" i="0">
+              <a:spcBef>
+                <a:spcPts val="0"/>
+              </a:spcBef>
+              <a:spcAft>
+                <a:spcPts val="0"/>
+              </a:spcAft>
+            </a:pPr>
+            <a:r>
+              <a:rPr sz="880" b="0" i="0" lang="zh-CN" altLang="zh-CN">
                 <a:solidFill>
                   <a:srgbClr val="595959"/>
                 </a:solidFill>
                 <a:latin typeface="Microsoft YaHei"/>
                 <a:ea typeface="Microsoft YaHei"/>
+                <a:cs typeface="Microsoft YaHei"/>
               </a:rPr>
               <a:t>高负载下显著上升</a:t>
             </a:r>
@@ -4196,14 +4343,21 @@
               <a:lnSpc>
                 <a:spcPct val="112000"/>
               </a:lnSpc>
-            </a:pPr>
-            <a:r>
-              <a:rPr sz="869" b="0" i="0">
+              <a:spcBef>
+                <a:spcPts val="0"/>
+              </a:spcBef>
+              <a:spcAft>
+                <a:spcPts val="0"/>
+              </a:spcAft>
+            </a:pPr>
+            <a:r>
+              <a:rPr sz="869" b="0" i="0" lang="zh-CN" altLang="zh-CN">
                 <a:solidFill>
                   <a:srgbClr val="595959"/>
                 </a:solidFill>
                 <a:latin typeface="Microsoft YaHei"/>
                 <a:ea typeface="Microsoft YaHei"/>
+                <a:cs typeface="Microsoft YaHei"/>
               </a:rPr>
               <a:t>数据来源: 现网实测 + 系统级仿真</a:t>
             </a:r>
@@ -4253,7 +4407,14 @@
           <a:bodyPr rtlCol="0" anchor="ctr"/>
           <a:lstStyle/>
           <a:p>
-            <a:pPr algn="ctr"/>
+            <a:pPr algn="ctr">
+              <a:spcBef>
+                <a:spcPts val="0"/>
+              </a:spcBef>
+              <a:spcAft>
+                <a:spcPts val="0"/>
+              </a:spcAft>
+            </a:pPr>
           </a:p>
         </p:txBody>
       </p:sp>
@@ -4301,7 +4462,14 @@
           <a:bodyPr rtlCol="0" anchor="ctr"/>
           <a:lstStyle/>
           <a:p>
-            <a:pPr algn="ctr"/>
+            <a:pPr algn="ctr">
+              <a:spcBef>
+                <a:spcPts val="0"/>
+              </a:spcBef>
+              <a:spcAft>
+                <a:spcPts val="0"/>
+              </a:spcAft>
+            </a:pPr>
           </a:p>
         </p:txBody>
       </p:sp>
@@ -4403,14 +4571,21 @@
               <a:lnSpc>
                 <a:spcPct val="112000"/>
               </a:lnSpc>
-            </a:pPr>
-            <a:r>
-              <a:rPr sz="1100" b="0" i="0">
+              <a:spcBef>
+                <a:spcPts val="0"/>
+              </a:spcBef>
+              <a:spcAft>
+                <a:spcPts val="0"/>
+              </a:spcAft>
+            </a:pPr>
+            <a:r>
+              <a:rPr sz="1100" b="0" i="0" lang="zh-CN" altLang="zh-CN">
                 <a:solidFill>
                   <a:srgbClr val="595959"/>
                 </a:solidFill>
                 <a:latin typeface="Microsoft YaHei"/>
                 <a:ea typeface="Microsoft YaHei"/>
+                <a:cs typeface="Microsoft YaHei"/>
               </a:rPr>
               <a:t>AI 配图区</a:t>
             </a:r>
@@ -4460,7 +4635,14 @@
           <a:bodyPr rtlCol="0" anchor="ctr"/>
           <a:lstStyle/>
           <a:p>
-            <a:pPr algn="ctr"/>
+            <a:pPr algn="ctr">
+              <a:spcBef>
+                <a:spcPts val="0"/>
+              </a:spcBef>
+              <a:spcAft>
+                <a:spcPts val="0"/>
+              </a:spcAft>
+            </a:pPr>
           </a:p>
         </p:txBody>
       </p:sp>
@@ -4508,7 +4690,14 @@
           <a:bodyPr rtlCol="0" anchor="ctr"/>
           <a:lstStyle/>
           <a:p>
-            <a:pPr algn="ctr"/>
+            <a:pPr algn="ctr">
+              <a:spcBef>
+                <a:spcPts val="0"/>
+              </a:spcBef>
+              <a:spcAft>
+                <a:spcPts val="0"/>
+              </a:spcAft>
+            </a:pPr>
           </a:p>
         </p:txBody>
       </p:sp>
@@ -4610,14 +4799,21 @@
               <a:lnSpc>
                 <a:spcPct val="112000"/>
               </a:lnSpc>
-            </a:pPr>
-            <a:r>
-              <a:rPr sz="1100" b="0" i="0">
+              <a:spcBef>
+                <a:spcPts val="0"/>
+              </a:spcBef>
+              <a:spcAft>
+                <a:spcPts val="0"/>
+              </a:spcAft>
+            </a:pPr>
+            <a:r>
+              <a:rPr sz="1100" b="0" i="0" lang="zh-CN" altLang="zh-CN">
                 <a:solidFill>
                   <a:srgbClr val="595959"/>
                 </a:solidFill>
                 <a:latin typeface="Microsoft YaHei"/>
                 <a:ea typeface="Microsoft YaHei"/>
+                <a:cs typeface="Microsoft YaHei"/>
               </a:rPr>
               <a:t>AI 配图区</a:t>
             </a:r>
@@ -4668,7 +4864,14 @@
           <a:bodyPr rtlCol="0" anchor="ctr"/>
           <a:lstStyle/>
           <a:p>
-            <a:pPr algn="ctr"/>
+            <a:pPr algn="ctr">
+              <a:spcBef>
+                <a:spcPts val="0"/>
+              </a:spcBef>
+              <a:spcAft>
+                <a:spcPts val="0"/>
+              </a:spcAft>
+            </a:pPr>
           </a:p>
         </p:txBody>
       </p:sp>
@@ -4716,7 +4919,14 @@
           <a:bodyPr rtlCol="0" anchor="ctr"/>
           <a:lstStyle/>
           <a:p>
-            <a:pPr algn="ctr"/>
+            <a:pPr algn="ctr">
+              <a:spcBef>
+                <a:spcPts val="0"/>
+              </a:spcBef>
+              <a:spcAft>
+                <a:spcPts val="0"/>
+              </a:spcAft>
+            </a:pPr>
           </a:p>
         </p:txBody>
       </p:sp>
@@ -4818,14 +5028,21 @@
               <a:lnSpc>
                 <a:spcPct val="112000"/>
               </a:lnSpc>
-            </a:pPr>
-            <a:r>
-              <a:rPr sz="1250" b="1" i="0">
+              <a:spcBef>
+                <a:spcPts val="0"/>
+              </a:spcBef>
+              <a:spcAft>
+                <a:spcPts val="0"/>
+              </a:spcAft>
+            </a:pPr>
+            <a:r>
+              <a:rPr sz="1250" b="1" i="0" lang="zh-CN" altLang="zh-CN">
                 <a:solidFill>
                   <a:srgbClr val="1F4E79"/>
                 </a:solidFill>
                 <a:latin typeface="Microsoft YaHei"/>
                 <a:ea typeface="Microsoft YaHei"/>
+                <a:cs typeface="Microsoft YaHei"/>
               </a:rPr>
               <a:t>计算资源</a:t>
             </a:r>
@@ -4858,14 +5075,21 @@
               <a:lnSpc>
                 <a:spcPct val="112000"/>
               </a:lnSpc>
-            </a:pPr>
-            <a:r>
-              <a:rPr sz="740" b="0" i="0">
+              <a:spcBef>
+                <a:spcPts val="0"/>
+              </a:spcBef>
+              <a:spcAft>
+                <a:spcPts val="0"/>
+              </a:spcAft>
+            </a:pPr>
+            <a:r>
+              <a:rPr sz="740" b="0" i="0" lang="zh-CN" altLang="zh-CN">
                 <a:solidFill>
                   <a:srgbClr val="595959"/>
                 </a:solidFill>
                 <a:latin typeface="Microsoft YaHei"/>
                 <a:ea typeface="Microsoft YaHei"/>
+                <a:cs typeface="Microsoft YaHei"/>
               </a:rPr>
               <a:t>GPU/NPU 异构算力池</a:t>
             </a:r>
@@ -4916,7 +5140,14 @@
           <a:bodyPr rtlCol="0" anchor="ctr"/>
           <a:lstStyle/>
           <a:p>
-            <a:pPr algn="ctr"/>
+            <a:pPr algn="ctr">
+              <a:spcBef>
+                <a:spcPts val="0"/>
+              </a:spcBef>
+              <a:spcAft>
+                <a:spcPts val="0"/>
+              </a:spcAft>
+            </a:pPr>
           </a:p>
         </p:txBody>
       </p:sp>
@@ -4946,14 +5177,21 @@
               <a:lnSpc>
                 <a:spcPct val="112000"/>
               </a:lnSpc>
-            </a:pPr>
-            <a:r>
-              <a:rPr sz="700" b="1" i="0">
+              <a:spcBef>
+                <a:spcPts val="0"/>
+              </a:spcBef>
+              <a:spcAft>
+                <a:spcPts val="0"/>
+              </a:spcAft>
+            </a:pPr>
+            <a:r>
+              <a:rPr sz="700" b="1" i="0" lang="zh-CN" altLang="zh-CN">
                 <a:solidFill>
                   <a:srgbClr val="1F4E79"/>
                 </a:solidFill>
                 <a:latin typeface="Microsoft YaHei"/>
                 <a:ea typeface="Microsoft YaHei"/>
+                <a:cs typeface="Microsoft YaHei"/>
               </a:rPr>
               <a:t>利用率</a:t>
             </a:r>
@@ -4986,14 +5224,21 @@
               <a:lnSpc>
                 <a:spcPct val="112000"/>
               </a:lnSpc>
-            </a:pPr>
-            <a:r>
-              <a:rPr sz="919" b="1" i="0">
+              <a:spcBef>
+                <a:spcPts val="0"/>
+              </a:spcBef>
+              <a:spcAft>
+                <a:spcPts val="0"/>
+              </a:spcAft>
+            </a:pPr>
+            <a:r>
+              <a:rPr sz="919" b="1" i="0" lang="zh-CN" altLang="zh-CN">
                 <a:solidFill>
                   <a:srgbClr val="1F4E79"/>
                 </a:solidFill>
                 <a:latin typeface="Microsoft YaHei"/>
                 <a:ea typeface="Microsoft YaHei"/>
+                <a:cs typeface="Microsoft YaHei"/>
               </a:rPr>
               <a:t>92%</a:t>
             </a:r>
@@ -5044,7 +5289,14 @@
           <a:bodyPr rtlCol="0" anchor="ctr"/>
           <a:lstStyle/>
           <a:p>
-            <a:pPr algn="ctr"/>
+            <a:pPr algn="ctr">
+              <a:spcBef>
+                <a:spcPts val="0"/>
+              </a:spcBef>
+              <a:spcAft>
+                <a:spcPts val="0"/>
+              </a:spcAft>
+            </a:pPr>
           </a:p>
         </p:txBody>
       </p:sp>
@@ -5092,7 +5344,14 @@
           <a:bodyPr rtlCol="0" anchor="ctr"/>
           <a:lstStyle/>
           <a:p>
-            <a:pPr algn="ctr"/>
+            <a:pPr algn="ctr">
+              <a:spcBef>
+                <a:spcPts val="0"/>
+              </a:spcBef>
+              <a:spcAft>
+                <a:spcPts val="0"/>
+              </a:spcAft>
+            </a:pPr>
           </a:p>
         </p:txBody>
       </p:sp>
@@ -5194,14 +5453,21 @@
               <a:lnSpc>
                 <a:spcPct val="112000"/>
               </a:lnSpc>
-            </a:pPr>
-            <a:r>
-              <a:rPr sz="1250" b="1" i="0">
+              <a:spcBef>
+                <a:spcPts val="0"/>
+              </a:spcBef>
+              <a:spcAft>
+                <a:spcPts val="0"/>
+              </a:spcAft>
+            </a:pPr>
+            <a:r>
+              <a:rPr sz="1250" b="1" i="0" lang="zh-CN" altLang="zh-CN">
                 <a:solidFill>
                   <a:srgbClr val="009D9A"/>
                 </a:solidFill>
                 <a:latin typeface="Microsoft YaHei"/>
                 <a:ea typeface="Microsoft YaHei"/>
+                <a:cs typeface="Microsoft YaHei"/>
               </a:rPr>
               <a:t>网络资源</a:t>
             </a:r>
@@ -5234,14 +5500,21 @@
               <a:lnSpc>
                 <a:spcPct val="112000"/>
               </a:lnSpc>
-            </a:pPr>
-            <a:r>
-              <a:rPr sz="740" b="0" i="0">
+              <a:spcBef>
+                <a:spcPts val="0"/>
+              </a:spcBef>
+              <a:spcAft>
+                <a:spcPts val="0"/>
+              </a:spcAft>
+            </a:pPr>
+            <a:r>
+              <a:rPr sz="740" b="0" i="0" lang="zh-CN" altLang="zh-CN">
                 <a:solidFill>
                   <a:srgbClr val="595959"/>
                 </a:solidFill>
                 <a:latin typeface="Microsoft YaHei"/>
                 <a:ea typeface="Microsoft YaHei"/>
+                <a:cs typeface="Microsoft YaHei"/>
               </a:rPr>
               <a:t>RDMA · RoCE 参数面</a:t>
             </a:r>
@@ -5292,7 +5565,14 @@
           <a:bodyPr rtlCol="0" anchor="ctr"/>
           <a:lstStyle/>
           <a:p>
-            <a:pPr algn="ctr"/>
+            <a:pPr algn="ctr">
+              <a:spcBef>
+                <a:spcPts val="0"/>
+              </a:spcBef>
+              <a:spcAft>
+                <a:spcPts val="0"/>
+              </a:spcAft>
+            </a:pPr>
           </a:p>
         </p:txBody>
       </p:sp>
@@ -5322,14 +5602,21 @@
               <a:lnSpc>
                 <a:spcPct val="112000"/>
               </a:lnSpc>
-            </a:pPr>
-            <a:r>
-              <a:rPr sz="700" b="1" i="0">
+              <a:spcBef>
+                <a:spcPts val="0"/>
+              </a:spcBef>
+              <a:spcAft>
+                <a:spcPts val="0"/>
+              </a:spcAft>
+            </a:pPr>
+            <a:r>
+              <a:rPr sz="700" b="1" i="0" lang="zh-CN" altLang="zh-CN">
                 <a:solidFill>
                   <a:srgbClr val="009D9A"/>
                 </a:solidFill>
                 <a:latin typeface="Microsoft YaHei"/>
                 <a:ea typeface="Microsoft YaHei"/>
+                <a:cs typeface="Microsoft YaHei"/>
               </a:rPr>
               <a:t>带宽占比</a:t>
             </a:r>
@@ -5362,14 +5649,21 @@
               <a:lnSpc>
                 <a:spcPct val="112000"/>
               </a:lnSpc>
-            </a:pPr>
-            <a:r>
-              <a:rPr sz="919" b="1" i="0">
+              <a:spcBef>
+                <a:spcPts val="0"/>
+              </a:spcBef>
+              <a:spcAft>
+                <a:spcPts val="0"/>
+              </a:spcAft>
+            </a:pPr>
+            <a:r>
+              <a:rPr sz="919" b="1" i="0" lang="zh-CN" altLang="zh-CN">
                 <a:solidFill>
                   <a:srgbClr val="009D9A"/>
                 </a:solidFill>
                 <a:latin typeface="Microsoft YaHei"/>
                 <a:ea typeface="Microsoft YaHei"/>
+                <a:cs typeface="Microsoft YaHei"/>
               </a:rPr>
               <a:t>86%</a:t>
             </a:r>
@@ -5420,7 +5714,14 @@
           <a:bodyPr rtlCol="0" anchor="ctr"/>
           <a:lstStyle/>
           <a:p>
-            <a:pPr algn="ctr"/>
+            <a:pPr algn="ctr">
+              <a:spcBef>
+                <a:spcPts val="0"/>
+              </a:spcBef>
+              <a:spcAft>
+                <a:spcPts val="0"/>
+              </a:spcAft>
+            </a:pPr>
           </a:p>
         </p:txBody>
       </p:sp>
@@ -5468,7 +5769,14 @@
           <a:bodyPr rtlCol="0" anchor="ctr"/>
           <a:lstStyle/>
           <a:p>
-            <a:pPr algn="ctr"/>
+            <a:pPr algn="ctr">
+              <a:spcBef>
+                <a:spcPts val="0"/>
+              </a:spcBef>
+              <a:spcAft>
+                <a:spcPts val="0"/>
+              </a:spcAft>
+            </a:pPr>
           </a:p>
         </p:txBody>
       </p:sp>
@@ -5570,14 +5878,21 @@
               <a:lnSpc>
                 <a:spcPct val="112000"/>
               </a:lnSpc>
-            </a:pPr>
-            <a:r>
-              <a:rPr sz="1250" b="1" i="0">
+              <a:spcBef>
+                <a:spcPts val="0"/>
+              </a:spcBef>
+              <a:spcAft>
+                <a:spcPts val="0"/>
+              </a:spcAft>
+            </a:pPr>
+            <a:r>
+              <a:rPr sz="1250" b="1" i="0" lang="zh-CN" altLang="zh-CN">
                 <a:solidFill>
                   <a:srgbClr val="2E8B3C"/>
                 </a:solidFill>
                 <a:latin typeface="Microsoft YaHei"/>
                 <a:ea typeface="Microsoft YaHei"/>
+                <a:cs typeface="Microsoft YaHei"/>
               </a:rPr>
               <a:t>存储资源</a:t>
             </a:r>
@@ -5610,14 +5925,21 @@
               <a:lnSpc>
                 <a:spcPct val="112000"/>
               </a:lnSpc>
-            </a:pPr>
-            <a:r>
-              <a:rPr sz="740" b="0" i="0">
+              <a:spcBef>
+                <a:spcPts val="0"/>
+              </a:spcBef>
+              <a:spcAft>
+                <a:spcPts val="0"/>
+              </a:spcAft>
+            </a:pPr>
+            <a:r>
+              <a:rPr sz="740" b="0" i="0" lang="zh-CN" altLang="zh-CN">
                 <a:solidFill>
                   <a:srgbClr val="595959"/>
                 </a:solidFill>
                 <a:latin typeface="Microsoft YaHei"/>
                 <a:ea typeface="Microsoft YaHei"/>
+                <a:cs typeface="Microsoft YaHei"/>
               </a:rPr>
               <a:t>分布式缓存与并行文件</a:t>
             </a:r>
@@ -5668,7 +5990,14 @@
           <a:bodyPr rtlCol="0" anchor="ctr"/>
           <a:lstStyle/>
           <a:p>
-            <a:pPr algn="ctr"/>
+            <a:pPr algn="ctr">
+              <a:spcBef>
+                <a:spcPts val="0"/>
+              </a:spcBef>
+              <a:spcAft>
+                <a:spcPts val="0"/>
+              </a:spcAft>
+            </a:pPr>
           </a:p>
         </p:txBody>
       </p:sp>
@@ -5698,14 +6027,21 @@
               <a:lnSpc>
                 <a:spcPct val="112000"/>
               </a:lnSpc>
-            </a:pPr>
-            <a:r>
-              <a:rPr sz="700" b="1" i="0">
+              <a:spcBef>
+                <a:spcPts val="0"/>
+              </a:spcBef>
+              <a:spcAft>
+                <a:spcPts val="0"/>
+              </a:spcAft>
+            </a:pPr>
+            <a:r>
+              <a:rPr sz="700" b="1" i="0" lang="zh-CN" altLang="zh-CN">
                 <a:solidFill>
                   <a:srgbClr val="2E8B3C"/>
                 </a:solidFill>
                 <a:latin typeface="Microsoft YaHei"/>
                 <a:ea typeface="Microsoft YaHei"/>
+                <a:cs typeface="Microsoft YaHei"/>
               </a:rPr>
               <a:t>命中率</a:t>
             </a:r>
@@ -5738,14 +6074,21 @@
               <a:lnSpc>
                 <a:spcPct val="112000"/>
               </a:lnSpc>
-            </a:pPr>
-            <a:r>
-              <a:rPr sz="919" b="1" i="0">
+              <a:spcBef>
+                <a:spcPts val="0"/>
+              </a:spcBef>
+              <a:spcAft>
+                <a:spcPts val="0"/>
+              </a:spcAft>
+            </a:pPr>
+            <a:r>
+              <a:rPr sz="919" b="1" i="0" lang="zh-CN" altLang="zh-CN">
                 <a:solidFill>
                   <a:srgbClr val="2E8B3C"/>
                 </a:solidFill>
                 <a:latin typeface="Microsoft YaHei"/>
                 <a:ea typeface="Microsoft YaHei"/>
+                <a:cs typeface="Microsoft YaHei"/>
               </a:rPr>
               <a:t>91%</a:t>
             </a:r>
@@ -5796,7 +6139,14 @@
           <a:bodyPr rtlCol="0" anchor="ctr"/>
           <a:lstStyle/>
           <a:p>
-            <a:pPr algn="ctr"/>
+            <a:pPr algn="ctr">
+              <a:spcBef>
+                <a:spcPts val="0"/>
+              </a:spcBef>
+              <a:spcAft>
+                <a:spcPts val="0"/>
+              </a:spcAft>
+            </a:pPr>
           </a:p>
         </p:txBody>
       </p:sp>
@@ -5844,7 +6194,14 @@
           <a:bodyPr rtlCol="0" anchor="ctr"/>
           <a:lstStyle/>
           <a:p>
-            <a:pPr algn="ctr"/>
+            <a:pPr algn="ctr">
+              <a:spcBef>
+                <a:spcPts val="0"/>
+              </a:spcBef>
+              <a:spcAft>
+                <a:spcPts val="0"/>
+              </a:spcAft>
+            </a:pPr>
           </a:p>
         </p:txBody>
       </p:sp>
@@ -5946,14 +6303,21 @@
               <a:lnSpc>
                 <a:spcPct val="112000"/>
               </a:lnSpc>
-            </a:pPr>
-            <a:r>
-              <a:rPr sz="1250" b="1" i="0">
+              <a:spcBef>
+                <a:spcPts val="0"/>
+              </a:spcBef>
+              <a:spcAft>
+                <a:spcPts val="0"/>
+              </a:spcAft>
+            </a:pPr>
+            <a:r>
+              <a:rPr sz="1250" b="1" i="0" lang="zh-CN" altLang="zh-CN">
                 <a:solidFill>
                   <a:srgbClr val="7050A0"/>
                 </a:solidFill>
                 <a:latin typeface="Microsoft YaHei"/>
                 <a:ea typeface="Microsoft YaHei"/>
+                <a:cs typeface="Microsoft YaHei"/>
               </a:rPr>
               <a:t>审计存证</a:t>
             </a:r>
@@ -5986,14 +6350,21 @@
               <a:lnSpc>
                 <a:spcPct val="112000"/>
               </a:lnSpc>
-            </a:pPr>
-            <a:r>
-              <a:rPr sz="740" b="0" i="0">
+              <a:spcBef>
+                <a:spcPts val="0"/>
+              </a:spcBef>
+              <a:spcAft>
+                <a:spcPts val="0"/>
+              </a:spcAft>
+            </a:pPr>
+            <a:r>
+              <a:rPr sz="740" b="0" i="0" lang="zh-CN" altLang="zh-CN">
                 <a:solidFill>
                   <a:srgbClr val="595959"/>
                 </a:solidFill>
                 <a:latin typeface="Microsoft YaHei"/>
                 <a:ea typeface="Microsoft YaHei"/>
+                <a:cs typeface="Microsoft YaHei"/>
               </a:rPr>
               <a:t>调度决策与回放数据</a:t>
             </a:r>
@@ -6044,7 +6415,14 @@
           <a:bodyPr rtlCol="0" anchor="ctr"/>
           <a:lstStyle/>
           <a:p>
-            <a:pPr algn="ctr"/>
+            <a:pPr algn="ctr">
+              <a:spcBef>
+                <a:spcPts val="0"/>
+              </a:spcBef>
+              <a:spcAft>
+                <a:spcPts val="0"/>
+              </a:spcAft>
+            </a:pPr>
           </a:p>
         </p:txBody>
       </p:sp>
@@ -6074,14 +6452,21 @@
               <a:lnSpc>
                 <a:spcPct val="112000"/>
               </a:lnSpc>
-            </a:pPr>
-            <a:r>
-              <a:rPr sz="700" b="1" i="0">
+              <a:spcBef>
+                <a:spcPts val="0"/>
+              </a:spcBef>
+              <a:spcAft>
+                <a:spcPts val="0"/>
+              </a:spcAft>
+            </a:pPr>
+            <a:r>
+              <a:rPr sz="700" b="1" i="0" lang="zh-CN" altLang="zh-CN">
                 <a:solidFill>
                   <a:srgbClr val="7050A0"/>
                 </a:solidFill>
                 <a:latin typeface="Microsoft YaHei"/>
                 <a:ea typeface="Microsoft YaHei"/>
+                <a:cs typeface="Microsoft YaHei"/>
               </a:rPr>
               <a:t>决策留痕</a:t>
             </a:r>
@@ -6114,14 +6499,21 @@
               <a:lnSpc>
                 <a:spcPct val="112000"/>
               </a:lnSpc>
-            </a:pPr>
-            <a:r>
-              <a:rPr sz="919" b="1" i="0">
+              <a:spcBef>
+                <a:spcPts val="0"/>
+              </a:spcBef>
+              <a:spcAft>
+                <a:spcPts val="0"/>
+              </a:spcAft>
+            </a:pPr>
+            <a:r>
+              <a:rPr sz="919" b="1" i="0" lang="zh-CN" altLang="zh-CN">
                 <a:solidFill>
                   <a:srgbClr val="7050A0"/>
                 </a:solidFill>
                 <a:latin typeface="Microsoft YaHei"/>
                 <a:ea typeface="Microsoft YaHei"/>
+                <a:cs typeface="Microsoft YaHei"/>
               </a:rPr>
               <a:t>100%</a:t>
             </a:r>
@@ -6170,7 +6562,14 @@
           <a:bodyPr rtlCol="0" anchor="ctr"/>
           <a:lstStyle/>
           <a:p>
-            <a:pPr algn="ctr"/>
+            <a:pPr algn="ctr">
+              <a:spcBef>
+                <a:spcPts val="0"/>
+              </a:spcBef>
+              <a:spcAft>
+                <a:spcPts val="0"/>
+              </a:spcAft>
+            </a:pPr>
           </a:p>
         </p:txBody>
       </p:sp>
@@ -6216,7 +6615,14 @@
           <a:bodyPr rtlCol="0" anchor="ctr"/>
           <a:lstStyle/>
           <a:p>
-            <a:pPr algn="ctr"/>
+            <a:pPr algn="ctr">
+              <a:spcBef>
+                <a:spcPts val="0"/>
+              </a:spcBef>
+              <a:spcAft>
+                <a:spcPts val="0"/>
+              </a:spcAft>
+            </a:pPr>
           </a:p>
         </p:txBody>
       </p:sp>
@@ -6260,7 +6666,14 @@
           <a:bodyPr rtlCol="0" anchor="ctr"/>
           <a:lstStyle/>
           <a:p>
-            <a:pPr algn="ctr"/>
+            <a:pPr algn="ctr">
+              <a:spcBef>
+                <a:spcPts val="0"/>
+              </a:spcBef>
+              <a:spcAft>
+                <a:spcPts val="0"/>
+              </a:spcAft>
+            </a:pPr>
           </a:p>
         </p:txBody>
       </p:sp>
@@ -6308,7 +6721,14 @@
           <a:bodyPr rtlCol="0" anchor="ctr"/>
           <a:lstStyle/>
           <a:p>
-            <a:pPr algn="ctr"/>
+            <a:pPr algn="ctr">
+              <a:spcBef>
+                <a:spcPts val="0"/>
+              </a:spcBef>
+              <a:spcAft>
+                <a:spcPts val="0"/>
+              </a:spcAft>
+            </a:pPr>
           </a:p>
         </p:txBody>
       </p:sp>
@@ -6392,8 +6812,8 @@
         </p:nvSpPr>
         <p:spPr>
           <a:xfrm>
-            <a:off x="6464300" y="3098800"/>
-            <a:ext cx="1066800" cy="228600"/>
+            <a:off x="6464300" y="3059557"/>
+            <a:ext cx="1066800" cy="307086"/>
           </a:xfrm>
           <a:prstGeom prst="rect">
             <a:avLst/>
@@ -6410,14 +6830,21 @@
               <a:lnSpc>
                 <a:spcPct val="112000"/>
               </a:lnSpc>
-            </a:pPr>
-            <a:r>
-              <a:rPr sz="1800" b="1" i="0">
+              <a:spcBef>
+                <a:spcPts val="0"/>
+              </a:spcBef>
+              <a:spcAft>
+                <a:spcPts val="0"/>
+              </a:spcAft>
+            </a:pPr>
+            <a:r>
+              <a:rPr sz="1800" b="1" i="0" lang="zh-CN" altLang="zh-CN">
                 <a:solidFill>
                   <a:srgbClr val="FFFFFF"/>
                 </a:solidFill>
                 <a:latin typeface="Microsoft YaHei"/>
                 <a:ea typeface="Microsoft YaHei"/>
+                <a:cs typeface="Microsoft YaHei"/>
               </a:rPr>
               <a:t>调度核心</a:t>
             </a:r>
@@ -6450,14 +6877,21 @@
               <a:lnSpc>
                 <a:spcPct val="112000"/>
               </a:lnSpc>
-            </a:pPr>
-            <a:r>
-              <a:rPr sz="1030" b="0" i="0">
+              <a:spcBef>
+                <a:spcPts val="0"/>
+              </a:spcBef>
+              <a:spcAft>
+                <a:spcPts val="0"/>
+              </a:spcAft>
+            </a:pPr>
+            <a:r>
+              <a:rPr sz="1030" b="0" i="0" lang="zh-CN" altLang="zh-CN">
                 <a:solidFill>
                   <a:srgbClr val="FFFFFF"/>
                 </a:solidFill>
                 <a:latin typeface="Microsoft YaHei"/>
                 <a:ea typeface="Microsoft YaHei"/>
+                <a:cs typeface="Microsoft YaHei"/>
               </a:rPr>
               <a:t>智能编排 · 流量整形</a:t>
             </a:r>
@@ -6467,14 +6901,21 @@
               <a:lnSpc>
                 <a:spcPct val="112000"/>
               </a:lnSpc>
-            </a:pPr>
-            <a:r>
-              <a:rPr sz="1030" b="0" i="0">
+              <a:spcBef>
+                <a:spcPts val="0"/>
+              </a:spcBef>
+              <a:spcAft>
+                <a:spcPts val="0"/>
+              </a:spcAft>
+            </a:pPr>
+            <a:r>
+              <a:rPr sz="1030" b="0" i="0" lang="zh-CN" altLang="zh-CN">
                 <a:solidFill>
                   <a:srgbClr val="FFFFFF"/>
                 </a:solidFill>
                 <a:latin typeface="Microsoft YaHei"/>
                 <a:ea typeface="Microsoft YaHei"/>
+                <a:cs typeface="Microsoft YaHei"/>
               </a:rPr>
               <a:t>任务恢复</a:t>
             </a:r>
@@ -6544,14 +6985,21 @@
               <a:lnSpc>
                 <a:spcPct val="112000"/>
               </a:lnSpc>
-            </a:pPr>
-            <a:r>
-              <a:rPr sz="860" b="0" i="0">
+              <a:spcBef>
+                <a:spcPts val="0"/>
+              </a:spcBef>
+              <a:spcAft>
+                <a:spcPts val="0"/>
+              </a:spcAft>
+            </a:pPr>
+            <a:r>
+              <a:rPr sz="860" b="0" i="0" lang="zh-CN" altLang="zh-CN">
                 <a:solidFill>
                   <a:srgbClr val="595959"/>
                 </a:solidFill>
                 <a:latin typeface="Microsoft YaHei"/>
                 <a:ea typeface="Microsoft YaHei"/>
+                <a:cs typeface="Microsoft YaHei"/>
               </a:rPr>
               <a:t>算力供给</a:t>
             </a:r>
@@ -6561,14 +7009,21 @@
               <a:lnSpc>
                 <a:spcPct val="112000"/>
               </a:lnSpc>
-            </a:pPr>
-            <a:r>
-              <a:rPr sz="860" b="0" i="0">
+              <a:spcBef>
+                <a:spcPts val="0"/>
+              </a:spcBef>
+              <a:spcAft>
+                <a:spcPts val="0"/>
+              </a:spcAft>
+            </a:pPr>
+            <a:r>
+              <a:rPr sz="860" b="0" i="0" lang="zh-CN" altLang="zh-CN">
                 <a:solidFill>
                   <a:srgbClr val="595959"/>
                 </a:solidFill>
                 <a:latin typeface="Microsoft YaHei"/>
                 <a:ea typeface="Microsoft YaHei"/>
+                <a:cs typeface="Microsoft YaHei"/>
               </a:rPr>
               <a:t>(92%)</a:t>
             </a:r>
@@ -6638,14 +7093,21 @@
               <a:lnSpc>
                 <a:spcPct val="112000"/>
               </a:lnSpc>
-            </a:pPr>
-            <a:r>
-              <a:rPr sz="860" b="0" i="0">
+              <a:spcBef>
+                <a:spcPts val="0"/>
+              </a:spcBef>
+              <a:spcAft>
+                <a:spcPts val="0"/>
+              </a:spcAft>
+            </a:pPr>
+            <a:r>
+              <a:rPr sz="860" b="0" i="0" lang="zh-CN" altLang="zh-CN">
                 <a:solidFill>
                   <a:srgbClr val="595959"/>
                 </a:solidFill>
                 <a:latin typeface="Microsoft YaHei"/>
                 <a:ea typeface="Microsoft YaHei"/>
+                <a:cs typeface="Microsoft YaHei"/>
               </a:rPr>
               <a:t>高速互联</a:t>
             </a:r>
@@ -6655,14 +7117,21 @@
               <a:lnSpc>
                 <a:spcPct val="112000"/>
               </a:lnSpc>
-            </a:pPr>
-            <a:r>
-              <a:rPr sz="860" b="0" i="0">
+              <a:spcBef>
+                <a:spcPts val="0"/>
+              </a:spcBef>
+              <a:spcAft>
+                <a:spcPts val="0"/>
+              </a:spcAft>
+            </a:pPr>
+            <a:r>
+              <a:rPr sz="860" b="0" i="0" lang="zh-CN" altLang="zh-CN">
                 <a:solidFill>
                   <a:srgbClr val="595959"/>
                 </a:solidFill>
                 <a:latin typeface="Microsoft YaHei"/>
                 <a:ea typeface="Microsoft YaHei"/>
+                <a:cs typeface="Microsoft YaHei"/>
               </a:rPr>
               <a:t>(86%)</a:t>
             </a:r>
@@ -6732,14 +7201,21 @@
               <a:lnSpc>
                 <a:spcPct val="112000"/>
               </a:lnSpc>
-            </a:pPr>
-            <a:r>
-              <a:rPr sz="860" b="0" i="0">
+              <a:spcBef>
+                <a:spcPts val="0"/>
+              </a:spcBef>
+              <a:spcAft>
+                <a:spcPts val="0"/>
+              </a:spcAft>
+            </a:pPr>
+            <a:r>
+              <a:rPr sz="860" b="0" i="0" lang="zh-CN" altLang="zh-CN">
                 <a:solidFill>
                   <a:srgbClr val="595959"/>
                 </a:solidFill>
                 <a:latin typeface="Microsoft YaHei"/>
                 <a:ea typeface="Microsoft YaHei"/>
+                <a:cs typeface="Microsoft YaHei"/>
               </a:rPr>
               <a:t>数据供给</a:t>
             </a:r>
@@ -6749,14 +7225,21 @@
               <a:lnSpc>
                 <a:spcPct val="112000"/>
               </a:lnSpc>
-            </a:pPr>
-            <a:r>
-              <a:rPr sz="860" b="0" i="0">
+              <a:spcBef>
+                <a:spcPts val="0"/>
+              </a:spcBef>
+              <a:spcAft>
+                <a:spcPts val="0"/>
+              </a:spcAft>
+            </a:pPr>
+            <a:r>
+              <a:rPr sz="860" b="0" i="0" lang="zh-CN" altLang="zh-CN">
                 <a:solidFill>
                   <a:srgbClr val="595959"/>
                 </a:solidFill>
                 <a:latin typeface="Microsoft YaHei"/>
                 <a:ea typeface="Microsoft YaHei"/>
+                <a:cs typeface="Microsoft YaHei"/>
               </a:rPr>
               <a:t>(91%)</a:t>
             </a:r>
@@ -6827,14 +7310,21 @@
               <a:lnSpc>
                 <a:spcPct val="112000"/>
               </a:lnSpc>
-            </a:pPr>
-            <a:r>
-              <a:rPr sz="860" b="0" i="0">
+              <a:spcBef>
+                <a:spcPts val="0"/>
+              </a:spcBef>
+              <a:spcAft>
+                <a:spcPts val="0"/>
+              </a:spcAft>
+            </a:pPr>
+            <a:r>
+              <a:rPr sz="860" b="0" i="0" lang="zh-CN" altLang="zh-CN">
                 <a:solidFill>
                   <a:srgbClr val="595959"/>
                 </a:solidFill>
                 <a:latin typeface="Microsoft YaHei"/>
                 <a:ea typeface="Microsoft YaHei"/>
+                <a:cs typeface="Microsoft YaHei"/>
               </a:rPr>
               <a:t>决策留痕</a:t>
             </a:r>
@@ -6844,14 +7334,21 @@
               <a:lnSpc>
                 <a:spcPct val="112000"/>
               </a:lnSpc>
-            </a:pPr>
-            <a:r>
-              <a:rPr sz="860" b="0" i="0">
+              <a:spcBef>
+                <a:spcPts val="0"/>
+              </a:spcBef>
+              <a:spcAft>
+                <a:spcPts val="0"/>
+              </a:spcAft>
+            </a:pPr>
+            <a:r>
+              <a:rPr sz="860" b="0" i="0" lang="zh-CN" altLang="zh-CN">
                 <a:solidFill>
                   <a:srgbClr val="595959"/>
                 </a:solidFill>
                 <a:latin typeface="Microsoft YaHei"/>
                 <a:ea typeface="Microsoft YaHei"/>
+                <a:cs typeface="Microsoft YaHei"/>
               </a:rPr>
               <a:t>(100%)</a:t>
             </a:r>
@@ -6921,14 +7418,21 @@
               <a:lnSpc>
                 <a:spcPct val="112000"/>
               </a:lnSpc>
-            </a:pPr>
-            <a:r>
-              <a:rPr sz="919" b="0" i="0">
+              <a:spcBef>
+                <a:spcPts val="0"/>
+              </a:spcBef>
+              <a:spcAft>
+                <a:spcPts val="0"/>
+              </a:spcAft>
+            </a:pPr>
+            <a:r>
+              <a:rPr sz="919" b="0" i="0" lang="zh-CN" altLang="zh-CN">
                 <a:solidFill>
                   <a:srgbClr val="595959"/>
                 </a:solidFill>
                 <a:latin typeface="Microsoft YaHei"/>
                 <a:ea typeface="Microsoft YaHei"/>
+                <a:cs typeface="Microsoft YaHei"/>
               </a:rPr>
               <a:t>任务恢复</a:t>
             </a:r>
@@ -6938,14 +7442,21 @@
               <a:lnSpc>
                 <a:spcPct val="112000"/>
               </a:lnSpc>
-            </a:pPr>
-            <a:r>
-              <a:rPr sz="919" b="0" i="0">
+              <a:spcBef>
+                <a:spcPts val="0"/>
+              </a:spcBef>
+              <a:spcAft>
+                <a:spcPts val="0"/>
+              </a:spcAft>
+            </a:pPr>
+            <a:r>
+              <a:rPr sz="919" b="0" i="0" lang="zh-CN" altLang="zh-CN">
                 <a:solidFill>
                   <a:srgbClr val="595959"/>
                 </a:solidFill>
                 <a:latin typeface="Microsoft YaHei"/>
                 <a:ea typeface="Microsoft YaHei"/>
+                <a:cs typeface="Microsoft YaHei"/>
               </a:rPr>
               <a:t>与推进</a:t>
             </a:r>
@@ -6996,7 +7507,14 @@
           <a:bodyPr rtlCol="0" anchor="ctr"/>
           <a:lstStyle/>
           <a:p>
-            <a:pPr algn="ctr"/>
+            <a:pPr algn="ctr">
+              <a:spcBef>
+                <a:spcPts val="0"/>
+              </a:spcBef>
+              <a:spcAft>
+                <a:spcPts val="0"/>
+              </a:spcAft>
+            </a:pPr>
           </a:p>
         </p:txBody>
       </p:sp>
@@ -7098,14 +7616,21 @@
               <a:lnSpc>
                 <a:spcPct val="112000"/>
               </a:lnSpc>
-            </a:pPr>
-            <a:r>
-              <a:rPr sz="1420" b="1" i="0">
+              <a:spcBef>
+                <a:spcPts val="0"/>
+              </a:spcBef>
+              <a:spcAft>
+                <a:spcPts val="0"/>
+              </a:spcAft>
+            </a:pPr>
+            <a:r>
+              <a:rPr sz="1420" b="1" i="0" lang="zh-CN" altLang="zh-CN">
                 <a:solidFill>
                   <a:srgbClr val="1F4E79"/>
                 </a:solidFill>
                 <a:latin typeface="Microsoft YaHei"/>
                 <a:ea typeface="Microsoft YaHei"/>
+                <a:cs typeface="Microsoft YaHei"/>
               </a:rPr>
               <a:t>资源画像与洞察</a:t>
             </a:r>
@@ -7138,14 +7663,21 @@
               <a:lnSpc>
                 <a:spcPct val="122000"/>
               </a:lnSpc>
-            </a:pPr>
-            <a:r>
-              <a:rPr sz="1030" b="0" i="0">
+              <a:spcBef>
+                <a:spcPts val="0"/>
+              </a:spcBef>
+              <a:spcAft>
+                <a:spcPts val="0"/>
+              </a:spcAft>
+            </a:pPr>
+            <a:r>
+              <a:rPr sz="1030" b="0" i="0" lang="zh-CN" altLang="zh-CN">
                 <a:solidFill>
                   <a:srgbClr val="262626"/>
                 </a:solidFill>
                 <a:latin typeface="Microsoft YaHei"/>
                 <a:ea typeface="Microsoft YaHei"/>
+                <a:cs typeface="Microsoft YaHei"/>
               </a:rPr>
               <a:t>基于全量调度证据实时构建算力、网络与存储三域资源画像, 融合历史趋势与故障关联, 形成可查全局视图。</a:t>
             </a:r>
@@ -7233,7 +7765,14 @@
           <a:bodyPr rtlCol="0" anchor="ctr"/>
           <a:lstStyle/>
           <a:p>
-            <a:pPr algn="ctr"/>
+            <a:pPr algn="ctr">
+              <a:spcBef>
+                <a:spcPts val="0"/>
+              </a:spcBef>
+              <a:spcAft>
+                <a:spcPts val="0"/>
+              </a:spcAft>
+            </a:pPr>
           </a:p>
         </p:txBody>
       </p:sp>
@@ -7335,14 +7874,21 @@
               <a:lnSpc>
                 <a:spcPct val="112000"/>
               </a:lnSpc>
-            </a:pPr>
-            <a:r>
-              <a:rPr sz="1420" b="1" i="0">
+              <a:spcBef>
+                <a:spcPts val="0"/>
+              </a:spcBef>
+              <a:spcAft>
+                <a:spcPts val="0"/>
+              </a:spcAft>
+            </a:pPr>
+            <a:r>
+              <a:rPr sz="1420" b="1" i="0" lang="zh-CN" altLang="zh-CN">
                 <a:solidFill>
                   <a:srgbClr val="009D9A"/>
                 </a:solidFill>
                 <a:latin typeface="Microsoft YaHei"/>
                 <a:ea typeface="Microsoft YaHei"/>
+                <a:cs typeface="Microsoft YaHei"/>
               </a:rPr>
               <a:t>恢复窗口与自愈</a:t>
             </a:r>
@@ -7375,14 +7921,21 @@
               <a:lnSpc>
                 <a:spcPct val="122000"/>
               </a:lnSpc>
-            </a:pPr>
-            <a:r>
-              <a:rPr sz="1030" b="0" i="0">
+              <a:spcBef>
+                <a:spcPts val="0"/>
+              </a:spcBef>
+              <a:spcAft>
+                <a:spcPts val="0"/>
+              </a:spcAft>
+            </a:pPr>
+            <a:r>
+              <a:rPr sz="1030" b="0" i="0" lang="zh-CN" altLang="zh-CN">
                 <a:solidFill>
                   <a:srgbClr val="262626"/>
                 </a:solidFill>
                 <a:latin typeface="Microsoft YaHei"/>
                 <a:ea typeface="Microsoft YaHei"/>
+                <a:cs typeface="Microsoft YaHei"/>
               </a:rPr>
               <a:t>故障发生后以快照与数据偏移为锚点, 计算最小恢复窗口并自动回退执行, 支撑热迁移与影子服务机制。</a:t>
             </a:r>
@@ -7470,7 +8023,14 @@
           <a:bodyPr rtlCol="0" anchor="ctr"/>
           <a:lstStyle/>
           <a:p>
-            <a:pPr algn="ctr"/>
+            <a:pPr algn="ctr">
+              <a:spcBef>
+                <a:spcPts val="0"/>
+              </a:spcBef>
+              <a:spcAft>
+                <a:spcPts val="0"/>
+              </a:spcAft>
+            </a:pPr>
           </a:p>
         </p:txBody>
       </p:sp>
@@ -7572,14 +8132,21 @@
               <a:lnSpc>
                 <a:spcPct val="112000"/>
               </a:lnSpc>
-            </a:pPr>
-            <a:r>
-              <a:rPr sz="1420" b="1" i="0">
+              <a:spcBef>
+                <a:spcPts val="0"/>
+              </a:spcBef>
+              <a:spcAft>
+                <a:spcPts val="0"/>
+              </a:spcAft>
+            </a:pPr>
+            <a:r>
+              <a:rPr sz="1420" b="1" i="0" lang="zh-CN" altLang="zh-CN">
                 <a:solidFill>
                   <a:srgbClr val="2E8B3C"/>
                 </a:solidFill>
                 <a:latin typeface="Microsoft YaHei"/>
                 <a:ea typeface="Microsoft YaHei"/>
+                <a:cs typeface="Microsoft YaHei"/>
               </a:rPr>
               <a:t>验收口径与保障</a:t>
             </a:r>
@@ -7612,14 +8179,21 @@
               <a:lnSpc>
                 <a:spcPct val="122000"/>
               </a:lnSpc>
-            </a:pPr>
-            <a:r>
-              <a:rPr sz="1030" b="0" i="0">
+              <a:spcBef>
+                <a:spcPts val="0"/>
+              </a:spcBef>
+              <a:spcAft>
+                <a:spcPts val="0"/>
+              </a:spcAft>
+            </a:pPr>
+            <a:r>
+              <a:rPr sz="1030" b="0" i="0" lang="zh-CN" altLang="zh-CN">
                 <a:solidFill>
                   <a:srgbClr val="262626"/>
                 </a:solidFill>
                 <a:latin typeface="Microsoft YaHei"/>
                 <a:ea typeface="Microsoft YaHei"/>
+                <a:cs typeface="Microsoft YaHei"/>
               </a:rPr>
               <a:t>围绕时间线、责任人与变更内容统一恢复事件验收口径, 确保链路证据可追溯可审计。</a:t>
             </a:r>
@@ -7670,7 +8244,14 @@
           <a:bodyPr rtlCol="0" anchor="ctr"/>
           <a:lstStyle/>
           <a:p>
-            <a:pPr algn="ctr"/>
+            <a:pPr algn="ctr">
+              <a:spcBef>
+                <a:spcPts val="0"/>
+              </a:spcBef>
+              <a:spcAft>
+                <a:spcPts val="0"/>
+              </a:spcAft>
+            </a:pPr>
           </a:p>
         </p:txBody>
       </p:sp>
@@ -7718,7 +8299,14 @@
           <a:bodyPr rtlCol="0" anchor="ctr"/>
           <a:lstStyle/>
           <a:p>
-            <a:pPr algn="ctr"/>
+            <a:pPr algn="ctr">
+              <a:spcBef>
+                <a:spcPts val="0"/>
+              </a:spcBef>
+              <a:spcAft>
+                <a:spcPts val="0"/>
+              </a:spcAft>
+            </a:pPr>
           </a:p>
         </p:txBody>
       </p:sp>
@@ -7766,7 +8354,14 @@
           <a:bodyPr rtlCol="0" anchor="ctr"/>
           <a:lstStyle/>
           <a:p>
-            <a:pPr algn="ctr"/>
+            <a:pPr algn="ctr">
+              <a:spcBef>
+                <a:spcPts val="0"/>
+              </a:spcBef>
+              <a:spcAft>
+                <a:spcPts val="0"/>
+              </a:spcAft>
+            </a:pPr>
           </a:p>
         </p:txBody>
       </p:sp>
@@ -7850,8 +8445,8 @@
         </p:nvSpPr>
         <p:spPr>
           <a:xfrm>
-            <a:off x="990599" y="5981700"/>
-            <a:ext cx="800100" cy="342900"/>
+            <a:off x="990599" y="5952109"/>
+            <a:ext cx="800100" cy="402082"/>
           </a:xfrm>
           <a:prstGeom prst="rect">
             <a:avLst/>
@@ -7868,14 +8463,21 @@
               <a:lnSpc>
                 <a:spcPct val="112000"/>
               </a:lnSpc>
-            </a:pPr>
-            <a:r>
-              <a:rPr sz="2400" b="1" i="0">
+              <a:spcBef>
+                <a:spcPts val="0"/>
+              </a:spcBef>
+              <a:spcAft>
+                <a:spcPts val="0"/>
+              </a:spcAft>
+            </a:pPr>
+            <a:r>
+              <a:rPr sz="2400" b="1" i="0" lang="zh-CN" altLang="zh-CN">
                 <a:solidFill>
                   <a:srgbClr val="FF8A00"/>
                 </a:solidFill>
                 <a:latin typeface="Microsoft YaHei"/>
                 <a:ea typeface="Microsoft YaHei"/>
+                <a:cs typeface="Microsoft YaHei"/>
               </a:rPr>
               <a:t>+20%</a:t>
             </a:r>
@@ -7908,14 +8510,21 @@
               <a:lnSpc>
                 <a:spcPct val="112000"/>
               </a:lnSpc>
-            </a:pPr>
-            <a:r>
-              <a:rPr sz="1180" b="1" i="0">
+              <a:spcBef>
+                <a:spcPts val="0"/>
+              </a:spcBef>
+              <a:spcAft>
+                <a:spcPts val="0"/>
+              </a:spcAft>
+            </a:pPr>
+            <a:r>
+              <a:rPr sz="1180" b="1" i="0" lang="zh-CN" altLang="zh-CN">
                 <a:solidFill>
                   <a:srgbClr val="262626"/>
                 </a:solidFill>
                 <a:latin typeface="Microsoft YaHei"/>
                 <a:ea typeface="Microsoft YaHei"/>
+                <a:cs typeface="Microsoft YaHei"/>
               </a:rPr>
               <a:t>上行容量提升</a:t>
             </a:r>
@@ -7948,14 +8557,21 @@
               <a:lnSpc>
                 <a:spcPct val="112000"/>
               </a:lnSpc>
-            </a:pPr>
-            <a:r>
-              <a:rPr sz="919" b="0" i="0">
+              <a:spcBef>
+                <a:spcPts val="0"/>
+              </a:spcBef>
+              <a:spcAft>
+                <a:spcPts val="0"/>
+              </a:spcAft>
+            </a:pPr>
+            <a:r>
+              <a:rPr sz="919" b="0" i="0" lang="zh-CN" altLang="zh-CN">
                 <a:solidFill>
                   <a:srgbClr val="595959"/>
                 </a:solidFill>
                 <a:latin typeface="Microsoft YaHei"/>
                 <a:ea typeface="Microsoft YaHei"/>
+                <a:cs typeface="Microsoft YaHei"/>
               </a:rPr>
               <a:t>高负载场景平均增益</a:t>
             </a:r>
@@ -8006,7 +8622,14 @@
           <a:bodyPr rtlCol="0" anchor="ctr"/>
           <a:lstStyle/>
           <a:p>
-            <a:pPr algn="ctr"/>
+            <a:pPr algn="ctr">
+              <a:spcBef>
+                <a:spcPts val="0"/>
+              </a:spcBef>
+              <a:spcAft>
+                <a:spcPts val="0"/>
+              </a:spcAft>
+            </a:pPr>
           </a:p>
         </p:txBody>
       </p:sp>
@@ -8054,7 +8677,14 @@
           <a:bodyPr rtlCol="0" anchor="ctr"/>
           <a:lstStyle/>
           <a:p>
-            <a:pPr algn="ctr"/>
+            <a:pPr algn="ctr">
+              <a:spcBef>
+                <a:spcPts val="0"/>
+              </a:spcBef>
+              <a:spcAft>
+                <a:spcPts val="0"/>
+              </a:spcAft>
+            </a:pPr>
           </a:p>
         </p:txBody>
       </p:sp>
@@ -8138,8 +8768,8 @@
         </p:nvSpPr>
         <p:spPr>
           <a:xfrm>
-            <a:off x="3879850" y="5981700"/>
-            <a:ext cx="800100" cy="342900"/>
+            <a:off x="3879850" y="5952109"/>
+            <a:ext cx="800100" cy="402082"/>
           </a:xfrm>
           <a:prstGeom prst="rect">
             <a:avLst/>
@@ -8156,14 +8786,21 @@
               <a:lnSpc>
                 <a:spcPct val="112000"/>
               </a:lnSpc>
-            </a:pPr>
-            <a:r>
-              <a:rPr sz="2400" b="1" i="0">
+              <a:spcBef>
+                <a:spcPts val="0"/>
+              </a:spcBef>
+              <a:spcAft>
+                <a:spcPts val="0"/>
+              </a:spcAft>
+            </a:pPr>
+            <a:r>
+              <a:rPr sz="2400" b="1" i="0" lang="zh-CN" altLang="zh-CN">
                 <a:solidFill>
                   <a:srgbClr val="FF8A00"/>
                 </a:solidFill>
                 <a:latin typeface="Microsoft YaHei"/>
                 <a:ea typeface="Microsoft YaHei"/>
+                <a:cs typeface="Microsoft YaHei"/>
               </a:rPr>
               <a:t>-42%</a:t>
             </a:r>
@@ -8196,14 +8833,21 @@
               <a:lnSpc>
                 <a:spcPct val="112000"/>
               </a:lnSpc>
-            </a:pPr>
-            <a:r>
-              <a:rPr sz="1180" b="1" i="0">
+              <a:spcBef>
+                <a:spcPts val="0"/>
+              </a:spcBef>
+              <a:spcAft>
+                <a:spcPts val="0"/>
+              </a:spcAft>
+            </a:pPr>
+            <a:r>
+              <a:rPr sz="1180" b="1" i="0" lang="zh-CN" altLang="zh-CN">
                 <a:solidFill>
                   <a:srgbClr val="262626"/>
                 </a:solidFill>
                 <a:latin typeface="Microsoft YaHei"/>
                 <a:ea typeface="Microsoft YaHei"/>
+                <a:cs typeface="Microsoft YaHei"/>
               </a:rPr>
               <a:t>恢复时长缩短</a:t>
             </a:r>
@@ -8236,14 +8880,21 @@
               <a:lnSpc>
                 <a:spcPct val="112000"/>
               </a:lnSpc>
-            </a:pPr>
-            <a:r>
-              <a:rPr sz="919" b="0" i="0">
+              <a:spcBef>
+                <a:spcPts val="0"/>
+              </a:spcBef>
+              <a:spcAft>
+                <a:spcPts val="0"/>
+              </a:spcAft>
+            </a:pPr>
+            <a:r>
+              <a:rPr sz="919" b="0" i="0" lang="zh-CN" altLang="zh-CN">
                 <a:solidFill>
                   <a:srgbClr val="595959"/>
                 </a:solidFill>
                 <a:latin typeface="Microsoft YaHei"/>
                 <a:ea typeface="Microsoft YaHei"/>
+                <a:cs typeface="Microsoft YaHei"/>
               </a:rPr>
               <a:t>较基线方案</a:t>
             </a:r>
@@ -8294,7 +8945,14 @@
           <a:bodyPr rtlCol="0" anchor="ctr"/>
           <a:lstStyle/>
           <a:p>
-            <a:pPr algn="ctr"/>
+            <a:pPr algn="ctr">
+              <a:spcBef>
+                <a:spcPts val="0"/>
+              </a:spcBef>
+              <a:spcAft>
+                <a:spcPts val="0"/>
+              </a:spcAft>
+            </a:pPr>
           </a:p>
         </p:txBody>
       </p:sp>
@@ -8342,7 +9000,14 @@
           <a:bodyPr rtlCol="0" anchor="ctr"/>
           <a:lstStyle/>
           <a:p>
-            <a:pPr algn="ctr"/>
+            <a:pPr algn="ctr">
+              <a:spcBef>
+                <a:spcPts val="0"/>
+              </a:spcBef>
+              <a:spcAft>
+                <a:spcPts val="0"/>
+              </a:spcAft>
+            </a:pPr>
           </a:p>
         </p:txBody>
       </p:sp>
@@ -8426,8 +9091,8 @@
         </p:nvSpPr>
         <p:spPr>
           <a:xfrm>
-            <a:off x="6769100" y="5981700"/>
-            <a:ext cx="800100" cy="342900"/>
+            <a:off x="6769100" y="5952109"/>
+            <a:ext cx="800100" cy="402082"/>
           </a:xfrm>
           <a:prstGeom prst="rect">
             <a:avLst/>
@@ -8444,14 +9109,21 @@
               <a:lnSpc>
                 <a:spcPct val="112000"/>
               </a:lnSpc>
-            </a:pPr>
-            <a:r>
-              <a:rPr sz="2400" b="1" i="0">
+              <a:spcBef>
+                <a:spcPts val="0"/>
+              </a:spcBef>
+              <a:spcAft>
+                <a:spcPts val="0"/>
+              </a:spcAft>
+            </a:pPr>
+            <a:r>
+              <a:rPr sz="2400" b="1" i="0" lang="zh-CN" altLang="zh-CN">
                 <a:solidFill>
                   <a:srgbClr val="FF8A00"/>
                 </a:solidFill>
                 <a:latin typeface="Microsoft YaHei"/>
                 <a:ea typeface="Microsoft YaHei"/>
+                <a:cs typeface="Microsoft YaHei"/>
               </a:rPr>
               <a:t>-31%</a:t>
             </a:r>
@@ -8484,14 +9156,21 @@
               <a:lnSpc>
                 <a:spcPct val="112000"/>
               </a:lnSpc>
-            </a:pPr>
-            <a:r>
-              <a:rPr sz="1180" b="1" i="0">
+              <a:spcBef>
+                <a:spcPts val="0"/>
+              </a:spcBef>
+              <a:spcAft>
+                <a:spcPts val="0"/>
+              </a:spcAft>
+            </a:pPr>
+            <a:r>
+              <a:rPr sz="1180" b="1" i="0" lang="zh-CN" altLang="zh-CN">
                 <a:solidFill>
                   <a:srgbClr val="262626"/>
                 </a:solidFill>
                 <a:latin typeface="Microsoft YaHei"/>
                 <a:ea typeface="Microsoft YaHei"/>
+                <a:cs typeface="Microsoft YaHei"/>
               </a:rPr>
               <a:t>算力空转降低</a:t>
             </a:r>
@@ -8524,14 +9203,21 @@
               <a:lnSpc>
                 <a:spcPct val="112000"/>
               </a:lnSpc>
-            </a:pPr>
-            <a:r>
-              <a:rPr sz="919" b="0" i="0">
+              <a:spcBef>
+                <a:spcPts val="0"/>
+              </a:spcBef>
+              <a:spcAft>
+                <a:spcPts val="0"/>
+              </a:spcAft>
+            </a:pPr>
+            <a:r>
+              <a:rPr sz="919" b="0" i="0" lang="zh-CN" altLang="zh-CN">
                 <a:solidFill>
                   <a:srgbClr val="595959"/>
                 </a:solidFill>
                 <a:latin typeface="Microsoft YaHei"/>
                 <a:ea typeface="Microsoft YaHei"/>
+                <a:cs typeface="Microsoft YaHei"/>
               </a:rPr>
               <a:t>资源利用率提升</a:t>
             </a:r>
@@ -8582,7 +9268,14 @@
           <a:bodyPr rtlCol="0" anchor="ctr"/>
           <a:lstStyle/>
           <a:p>
-            <a:pPr algn="ctr"/>
+            <a:pPr algn="ctr">
+              <a:spcBef>
+                <a:spcPts val="0"/>
+              </a:spcBef>
+              <a:spcAft>
+                <a:spcPts val="0"/>
+              </a:spcAft>
+            </a:pPr>
           </a:p>
         </p:txBody>
       </p:sp>
@@ -8630,7 +9323,14 @@
           <a:bodyPr rtlCol="0" anchor="ctr"/>
           <a:lstStyle/>
           <a:p>
-            <a:pPr algn="ctr"/>
+            <a:pPr algn="ctr">
+              <a:spcBef>
+                <a:spcPts val="0"/>
+              </a:spcBef>
+              <a:spcAft>
+                <a:spcPts val="0"/>
+              </a:spcAft>
+            </a:pPr>
           </a:p>
         </p:txBody>
       </p:sp>
@@ -8714,8 +9414,8 @@
         </p:nvSpPr>
         <p:spPr>
           <a:xfrm>
-            <a:off x="9658350" y="5981700"/>
-            <a:ext cx="800100" cy="342900"/>
+            <a:off x="9658350" y="5952109"/>
+            <a:ext cx="800100" cy="402082"/>
           </a:xfrm>
           <a:prstGeom prst="rect">
             <a:avLst/>
@@ -8732,14 +9432,21 @@
               <a:lnSpc>
                 <a:spcPct val="112000"/>
               </a:lnSpc>
-            </a:pPr>
-            <a:r>
-              <a:rPr sz="2400" b="1" i="0">
+              <a:spcBef>
+                <a:spcPts val="0"/>
+              </a:spcBef>
+              <a:spcAft>
+                <a:spcPts val="0"/>
+              </a:spcAft>
+            </a:pPr>
+            <a:r>
+              <a:rPr sz="2400" b="1" i="0" lang="zh-CN" altLang="zh-CN">
                 <a:solidFill>
                   <a:srgbClr val="FF8A00"/>
                 </a:solidFill>
                 <a:latin typeface="Microsoft YaHei"/>
                 <a:ea typeface="Microsoft YaHei"/>
+                <a:cs typeface="Microsoft YaHei"/>
               </a:rPr>
               <a:t>100%</a:t>
             </a:r>
@@ -8772,14 +9479,21 @@
               <a:lnSpc>
                 <a:spcPct val="112000"/>
               </a:lnSpc>
-            </a:pPr>
-            <a:r>
-              <a:rPr sz="1180" b="1" i="0">
+              <a:spcBef>
+                <a:spcPts val="0"/>
+              </a:spcBef>
+              <a:spcAft>
+                <a:spcPts val="0"/>
+              </a:spcAft>
+            </a:pPr>
+            <a:r>
+              <a:rPr sz="1180" b="1" i="0" lang="zh-CN" altLang="zh-CN">
                 <a:solidFill>
                   <a:srgbClr val="262626"/>
                 </a:solidFill>
                 <a:latin typeface="Microsoft YaHei"/>
                 <a:ea typeface="Microsoft YaHei"/>
+                <a:cs typeface="Microsoft YaHei"/>
               </a:rPr>
               <a:t>审计覆盖率</a:t>
             </a:r>
@@ -8812,14 +9526,21 @@
               <a:lnSpc>
                 <a:spcPct val="112000"/>
               </a:lnSpc>
-            </a:pPr>
-            <a:r>
-              <a:rPr sz="919" b="0" i="0">
+              <a:spcBef>
+                <a:spcPts val="0"/>
+              </a:spcBef>
+              <a:spcAft>
+                <a:spcPts val="0"/>
+              </a:spcAft>
+            </a:pPr>
+            <a:r>
+              <a:rPr sz="919" b="0" i="0" lang="zh-CN" altLang="zh-CN">
                 <a:solidFill>
                   <a:srgbClr val="595959"/>
                 </a:solidFill>
                 <a:latin typeface="Microsoft YaHei"/>
                 <a:ea typeface="Microsoft YaHei"/>
+                <a:cs typeface="Microsoft YaHei"/>
               </a:rPr>
               <a:t>决策可追溯可复盘</a:t>
             </a:r>
